--- a/assets/powerpoints/module-n3-epicerie/C3-lire-la-circulaire.pptx
+++ b/assets/powerpoints/module-n3-epicerie/C3-lire-la-circulaire.pptx
@@ -10680,7 +10680,43 @@
                 </a:solidFill>
                 <a:latin typeface="Verdana"/>
               </a:rPr>
-              <a:t>Le poulet passe de 4,79 $ à 3 $ la livre : l'économie est de &lt;b&gt;1,79 $ la livre&lt;/b&gt;. Pour trois livres, cela fait &lt;b&gt;5,37 $&lt;/b&gt;. C'est ce chiffre-là qui compte, pas la taille du rabais annoncé.</a:t>
+              <a:t>Le poulet passe de 4,79 $ à 3 $ la livre : l'économie est de </a:t>
+            </a:r>
+            <a:r>
+              <a:rPr sz="2000" b="1" i="0">
+                <a:solidFill>
+                  <a:srgbClr val="4B4F52"/>
+                </a:solidFill>
+                <a:latin typeface="Verdana"/>
+              </a:rPr>
+              <a:t>1,79 $ la livre</a:t>
+            </a:r>
+            <a:r>
+              <a:rPr sz="2000" b="0" i="0">
+                <a:solidFill>
+                  <a:srgbClr val="4B4F52"/>
+                </a:solidFill>
+                <a:latin typeface="Verdana"/>
+              </a:rPr>
+              <a:t>. Pour trois livres, cela fait </a:t>
+            </a:r>
+            <a:r>
+              <a:rPr sz="2000" b="1" i="0">
+                <a:solidFill>
+                  <a:srgbClr val="4B4F52"/>
+                </a:solidFill>
+                <a:latin typeface="Verdana"/>
+              </a:rPr>
+              <a:t>5,37 $</a:t>
+            </a:r>
+            <a:r>
+              <a:rPr sz="2000" b="0" i="0">
+                <a:solidFill>
+                  <a:srgbClr val="4B4F52"/>
+                </a:solidFill>
+                <a:latin typeface="Verdana"/>
+              </a:rPr>
+              <a:t>. C'est ce chiffre-là qui compte, pas la taille du rabais annoncé.</a:t>
             </a:r>
           </a:p>
         </p:txBody>
